--- a/classes/parte-2-criptografia-aplicada/048-cifrado-de-flujo-chacha20-y-por-que-evitar-rc4/clase-048-presentacion.pptx
+++ b/classes/parte-2-criptografia-aplicada/048-cifrado-de-flujo-chacha20-y-por-que-evitar-rc4/clase-048-presentacion.pptx
@@ -17,6 +17,9 @@
     <p:sldId id="265" r:id="rId16"/>
     <p:sldId id="266" r:id="rId17"/>
     <p:sldId id="267" r:id="rId18"/>
+    <p:sldId id="268" r:id="rId19"/>
+    <p:sldId id="269" r:id="rId20"/>
+    <p:sldId id="270" r:id="rId21"/>
   </p:sldIdLst>
   <p:sldSz cx="9144000" cy="6858000" type="screen4x3"/>
   <p:notesSz cx="6858000" cy="9144000"/>
@@ -3198,7 +3201,7 @@
                   <a:srgbClr val="0B3D2E"/>
                 </a:solidFill>
               </a:rPr>
-              <a:t>⚠️ Errores comunes</a:t>
+              <a:t>✍️ Ejercicios</a:t>
             </a:r>
           </a:p>
         </p:txBody>
@@ -3236,67 +3239,82 @@
                   <a:srgbClr val="22282E"/>
                 </a:solidFill>
               </a:rPr>
-              <a:t>•  Textos correlacionados — Nonce reutilizado; genera nonce único por mensaje</a:t>
-            </a:r>
-          </a:p>
-          <a:p>
-            <a:pPr>
-              <a:spcAft>
-                <a:spcPts val="600"/>
-              </a:spcAft>
-            </a:pPr>
-            <a:r>
-              <a:rPr sz="1500">
-                <a:solidFill>
-                  <a:srgbClr val="22282E"/>
-                </a:solidFill>
-              </a:rPr>
-              <a:t>•  Uso de RC4 en configuración TLS — Prohibido (RFC 7465); deshabilítalo</a:t>
-            </a:r>
-          </a:p>
-          <a:p>
-            <a:pPr>
-              <a:spcAft>
-                <a:spcPts val="600"/>
-              </a:spcAft>
-            </a:pPr>
-            <a:r>
-              <a:rPr sz="1500">
-                <a:solidFill>
-                  <a:srgbClr val="22282E"/>
-                </a:solidFill>
-              </a:rPr>
-              <a:t>•  Nonce de tamaño incorrecto — Ajusta a lo que exige la librería (12 o 16 bytes)</a:t>
-            </a:r>
-          </a:p>
-          <a:p>
-            <a:pPr>
-              <a:spcAft>
-                <a:spcPts val="600"/>
-              </a:spcAft>
-            </a:pPr>
-            <a:r>
-              <a:rPr sz="1500">
-                <a:solidFill>
-                  <a:srgbClr val="22282E"/>
-                </a:solidFill>
-              </a:rPr>
-              <a:t>•  Cifrado sin MAC — XOR malleable; usa ChaCha20-Poly1305</a:t>
-            </a:r>
-          </a:p>
-          <a:p>
-            <a:pPr>
-              <a:spcAft>
-                <a:spcPts val="600"/>
-              </a:spcAft>
-            </a:pPr>
-            <a:r>
-              <a:rPr sz="1500">
-                <a:solidFill>
-                  <a:srgbClr val="22282E"/>
-                </a:solidFill>
-              </a:rPr>
-              <a:t>•  Contador desbordado — No reuses claves más allá del límite del contador</a:t>
+              <a:t>•  Explica por qué un cifrado de flujo no necesita padding.</a:t>
+            </a:r>
+          </a:p>
+          <a:p>
+            <a:pPr>
+              <a:spcAft>
+                <a:spcPts val="600"/>
+              </a:spcAft>
+            </a:pPr>
+            <a:r>
+              <a:rPr sz="1500">
+                <a:solidFill>
+                  <a:srgbClr val="22282E"/>
+                </a:solidFill>
+              </a:rPr>
+              <a:t>•  Demuestra matemáticamente por qué c1 XOR c2 = m1 XOR m2 con nonce repetido.</a:t>
+            </a:r>
+          </a:p>
+          <a:p>
+            <a:pPr>
+              <a:spcAft>
+                <a:spcPts val="600"/>
+              </a:spcAft>
+            </a:pPr>
+            <a:r>
+              <a:rPr sz="1500">
+                <a:solidFill>
+                  <a:srgbClr val="22282E"/>
+                </a:solidFill>
+              </a:rPr>
+              <a:t>•  Investiga el ataque a WEP y qué papel jugó RC4.</a:t>
+            </a:r>
+          </a:p>
+          <a:p>
+            <a:pPr>
+              <a:spcAft>
+                <a:spcPts val="600"/>
+              </a:spcAft>
+            </a:pPr>
+            <a:r>
+              <a:rPr sz="1500">
+                <a:solidFill>
+                  <a:srgbClr val="22282E"/>
+                </a:solidFill>
+              </a:rPr>
+              <a:t>•  ¿Por qué ChaCha20 es preferible en móviles frente a AES sin aceleración hardware?</a:t>
+            </a:r>
+          </a:p>
+          <a:p>
+            <a:pPr>
+              <a:spcAft>
+                <a:spcPts val="600"/>
+              </a:spcAft>
+            </a:pPr>
+            <a:r>
+              <a:rPr sz="1500">
+                <a:solidFill>
+                  <a:srgbClr val="22282E"/>
+                </a:solidFill>
+              </a:rPr>
+              <a:t>•  Modifica un byte de un cifrado ChaCha20 y observa el efecto en el descifrado.</a:t>
+            </a:r>
+          </a:p>
+          <a:p>
+            <a:pPr>
+              <a:spcAft>
+                <a:spcPts val="600"/>
+              </a:spcAft>
+            </a:pPr>
+            <a:r>
+              <a:rPr sz="1500">
+                <a:solidFill>
+                  <a:srgbClr val="22282E"/>
+                </a:solidFill>
+              </a:rPr>
+              <a:t>•  Explica qué añade Poly1305 que ChaCha20 solo no ofrece.</a:t>
             </a:r>
           </a:p>
         </p:txBody>
@@ -3347,7 +3365,7 @@
                   <a:srgbClr val="0B3D2E"/>
                 </a:solidFill>
               </a:rPr>
-              <a:t>❓ Preguntas frecuentes</a:t>
+              <a:t>📝 Reto verificable</a:t>
             </a:r>
           </a:p>
         </p:txBody>
@@ -3385,82 +3403,7 @@
                   <a:srgbClr val="22282E"/>
                 </a:solidFill>
               </a:rPr>
-              <a:t>•  ❓ ¿ChaCha20 es más seguro que AES?</a:t>
-            </a:r>
-          </a:p>
-          <a:p>
-            <a:pPr>
-              <a:spcAft>
-                <a:spcPts val="600"/>
-              </a:spcAft>
-            </a:pPr>
-            <a:r>
-              <a:rPr sz="1500">
-                <a:solidFill>
-                  <a:srgbClr val="22282E"/>
-                </a:solidFill>
-              </a:rPr>
-              <a:t>•  Ambos son seguros. ChaCha20 destaca en software y resistencia a timing; AES gana con aceleración hardware.</a:t>
-            </a:r>
-          </a:p>
-          <a:p>
-            <a:pPr>
-              <a:spcAft>
-                <a:spcPts val="600"/>
-              </a:spcAft>
-            </a:pPr>
-            <a:r>
-              <a:rPr sz="1500">
-                <a:solidFill>
-                  <a:srgbClr val="22282E"/>
-                </a:solidFill>
-              </a:rPr>
-              <a:t>•  ❓ ¿Puedo usar el mismo nonce si cambio la clave?</a:t>
-            </a:r>
-          </a:p>
-          <a:p>
-            <a:pPr>
-              <a:spcAft>
-                <a:spcPts val="600"/>
-              </a:spcAft>
-            </a:pPr>
-            <a:r>
-              <a:rPr sz="1500">
-                <a:solidFill>
-                  <a:srgbClr val="22282E"/>
-                </a:solidFill>
-              </a:rPr>
-              <a:t>•  Sí; lo prohibido es repetir el par (clave, nonce). Un nonce por clave es único de forma segura.</a:t>
-            </a:r>
-          </a:p>
-          <a:p>
-            <a:pPr>
-              <a:spcAft>
-                <a:spcPts val="600"/>
-              </a:spcAft>
-            </a:pPr>
-            <a:r>
-              <a:rPr sz="1500">
-                <a:solidFill>
-                  <a:srgbClr val="22282E"/>
-                </a:solidFill>
-              </a:rPr>
-              <a:t>•  ❓ ¿Por qué se sigue viendo RC4 en sistemas viejos?</a:t>
-            </a:r>
-          </a:p>
-          <a:p>
-            <a:pPr>
-              <a:spcAft>
-                <a:spcPts val="600"/>
-              </a:spcAft>
-            </a:pPr>
-            <a:r>
-              <a:rPr sz="1500">
-                <a:solidFill>
-                  <a:srgbClr val="22282E"/>
-                </a:solidFill>
-              </a:rPr>
-              <a:t>•  Legado. Debe deshabilitarse; TLS moderno lo prohíbe.</a:t>
+              <a:t>•  Implementa el ataque de "nonce reutilizado": dados dos textos cifrados con la misma clave y nonce y conocido parcialmente uno de ellos (crib dragging), recupera el otro. Criterio de aceptación…</a:t>
             </a:r>
           </a:p>
         </p:txBody>
@@ -3511,7 +3454,7 @@
                   <a:srgbClr val="0B3D2E"/>
                 </a:solidFill>
               </a:rPr>
-              <a:t>🔗 Referencias</a:t>
+              <a:t>⚠️ Errores comunes</a:t>
             </a:r>
           </a:p>
         </p:txBody>
@@ -3549,6 +3492,319 @@
                   <a:srgbClr val="22282E"/>
                 </a:solidFill>
               </a:rPr>
+              <a:t>•  Textos correlacionados — Nonce reutilizado; genera nonce único por mensaje</a:t>
+            </a:r>
+          </a:p>
+          <a:p>
+            <a:pPr>
+              <a:spcAft>
+                <a:spcPts val="600"/>
+              </a:spcAft>
+            </a:pPr>
+            <a:r>
+              <a:rPr sz="1500">
+                <a:solidFill>
+                  <a:srgbClr val="22282E"/>
+                </a:solidFill>
+              </a:rPr>
+              <a:t>•  Uso de RC4 en configuración TLS — Prohibido (RFC 7465); deshabilítalo</a:t>
+            </a:r>
+          </a:p>
+          <a:p>
+            <a:pPr>
+              <a:spcAft>
+                <a:spcPts val="600"/>
+              </a:spcAft>
+            </a:pPr>
+            <a:r>
+              <a:rPr sz="1500">
+                <a:solidFill>
+                  <a:srgbClr val="22282E"/>
+                </a:solidFill>
+              </a:rPr>
+              <a:t>•  Nonce de tamaño incorrecto — Ajusta a lo que exige la librería (12 o 16 bytes)</a:t>
+            </a:r>
+          </a:p>
+          <a:p>
+            <a:pPr>
+              <a:spcAft>
+                <a:spcPts val="600"/>
+              </a:spcAft>
+            </a:pPr>
+            <a:r>
+              <a:rPr sz="1500">
+                <a:solidFill>
+                  <a:srgbClr val="22282E"/>
+                </a:solidFill>
+              </a:rPr>
+              <a:t>•  Cifrado sin MAC — XOR malleable; usa ChaCha20-Poly1305</a:t>
+            </a:r>
+          </a:p>
+          <a:p>
+            <a:pPr>
+              <a:spcAft>
+                <a:spcPts val="600"/>
+              </a:spcAft>
+            </a:pPr>
+            <a:r>
+              <a:rPr sz="1500">
+                <a:solidFill>
+                  <a:srgbClr val="22282E"/>
+                </a:solidFill>
+              </a:rPr>
+              <a:t>•  Contador desbordado — No reuses claves más allá del límite del contador</a:t>
+            </a:r>
+          </a:p>
+        </p:txBody>
+      </p:sp>
+    </p:spTree>
+  </p:cSld>
+  <p:clrMapOvr>
+    <a:masterClrMapping/>
+  </p:clrMapOvr>
+</p:sld>
+</file>
+
+<file path=ppt/slides/slide13.xml><?xml version="1.0" encoding="utf-8"?>
+<p:sld xmlns:a="http://schemas.openxmlformats.org/drawingml/2006/main" xmlns:p="http://schemas.openxmlformats.org/presentationml/2006/main" xmlns:r="http://schemas.openxmlformats.org/officeDocument/2006/relationships">
+  <p:cSld>
+    <p:spTree>
+      <p:nvGrpSpPr>
+        <p:cNvPr id="1" name=""/>
+        <p:cNvGrpSpPr/>
+        <p:nvPr/>
+      </p:nvGrpSpPr>
+      <p:grpSpPr/>
+      <p:sp>
+        <p:nvSpPr>
+          <p:cNvPr id="2" name="TextBox 1"/>
+          <p:cNvSpPr txBox="1"/>
+          <p:nvPr/>
+        </p:nvSpPr>
+        <p:spPr>
+          <a:xfrm>
+            <a:off x="457200" y="320040"/>
+            <a:ext cx="8229600" cy="822960"/>
+          </a:xfrm>
+          <a:prstGeom prst="rect">
+            <a:avLst/>
+          </a:prstGeom>
+          <a:noFill/>
+        </p:spPr>
+        <p:txBody>
+          <a:bodyPr wrap="square">
+            <a:spAutoFit/>
+          </a:bodyPr>
+          <a:lstStyle/>
+          <a:p>
+            <a:r>
+              <a:rPr sz="2600" b="1">
+                <a:solidFill>
+                  <a:srgbClr val="0B3D2E"/>
+                </a:solidFill>
+              </a:rPr>
+              <a:t>❓ Preguntas frecuentes</a:t>
+            </a:r>
+          </a:p>
+        </p:txBody>
+      </p:sp>
+      <p:sp>
+        <p:nvSpPr>
+          <p:cNvPr id="3" name="TextBox 2"/>
+          <p:cNvSpPr txBox="1"/>
+          <p:nvPr/>
+        </p:nvSpPr>
+        <p:spPr>
+          <a:xfrm>
+            <a:off x="457200" y="1280160"/>
+            <a:ext cx="8229600" cy="4937760"/>
+          </a:xfrm>
+          <a:prstGeom prst="rect">
+            <a:avLst/>
+          </a:prstGeom>
+          <a:noFill/>
+        </p:spPr>
+        <p:txBody>
+          <a:bodyPr wrap="square">
+            <a:spAutoFit/>
+          </a:bodyPr>
+          <a:lstStyle/>
+          <a:p>
+            <a:pPr>
+              <a:spcAft>
+                <a:spcPts val="600"/>
+              </a:spcAft>
+            </a:pPr>
+            <a:r>
+              <a:rPr sz="1500">
+                <a:solidFill>
+                  <a:srgbClr val="22282E"/>
+                </a:solidFill>
+              </a:rPr>
+              <a:t>•  ❓ ¿ChaCha20 es más seguro que AES?</a:t>
+            </a:r>
+          </a:p>
+          <a:p>
+            <a:pPr>
+              <a:spcAft>
+                <a:spcPts val="600"/>
+              </a:spcAft>
+            </a:pPr>
+            <a:r>
+              <a:rPr sz="1500">
+                <a:solidFill>
+                  <a:srgbClr val="22282E"/>
+                </a:solidFill>
+              </a:rPr>
+              <a:t>•  Ambos son seguros. ChaCha20 destaca en software y resistencia a timing; AES gana con aceleración hardware.</a:t>
+            </a:r>
+          </a:p>
+          <a:p>
+            <a:pPr>
+              <a:spcAft>
+                <a:spcPts val="600"/>
+              </a:spcAft>
+            </a:pPr>
+            <a:r>
+              <a:rPr sz="1500">
+                <a:solidFill>
+                  <a:srgbClr val="22282E"/>
+                </a:solidFill>
+              </a:rPr>
+              <a:t>•  ❓ ¿Puedo usar el mismo nonce si cambio la clave?</a:t>
+            </a:r>
+          </a:p>
+          <a:p>
+            <a:pPr>
+              <a:spcAft>
+                <a:spcPts val="600"/>
+              </a:spcAft>
+            </a:pPr>
+            <a:r>
+              <a:rPr sz="1500">
+                <a:solidFill>
+                  <a:srgbClr val="22282E"/>
+                </a:solidFill>
+              </a:rPr>
+              <a:t>•  Sí; lo prohibido es repetir el par (clave, nonce). Un nonce por clave es único de forma segura.</a:t>
+            </a:r>
+          </a:p>
+          <a:p>
+            <a:pPr>
+              <a:spcAft>
+                <a:spcPts val="600"/>
+              </a:spcAft>
+            </a:pPr>
+            <a:r>
+              <a:rPr sz="1500">
+                <a:solidFill>
+                  <a:srgbClr val="22282E"/>
+                </a:solidFill>
+              </a:rPr>
+              <a:t>•  ❓ ¿Por qué se sigue viendo RC4 en sistemas viejos?</a:t>
+            </a:r>
+          </a:p>
+          <a:p>
+            <a:pPr>
+              <a:spcAft>
+                <a:spcPts val="600"/>
+              </a:spcAft>
+            </a:pPr>
+            <a:r>
+              <a:rPr sz="1500">
+                <a:solidFill>
+                  <a:srgbClr val="22282E"/>
+                </a:solidFill>
+              </a:rPr>
+              <a:t>•  Legado. Debe deshabilitarse; TLS moderno lo prohíbe.</a:t>
+            </a:r>
+          </a:p>
+        </p:txBody>
+      </p:sp>
+    </p:spTree>
+  </p:cSld>
+  <p:clrMapOvr>
+    <a:masterClrMapping/>
+  </p:clrMapOvr>
+</p:sld>
+</file>
+
+<file path=ppt/slides/slide14.xml><?xml version="1.0" encoding="utf-8"?>
+<p:sld xmlns:a="http://schemas.openxmlformats.org/drawingml/2006/main" xmlns:p="http://schemas.openxmlformats.org/presentationml/2006/main" xmlns:r="http://schemas.openxmlformats.org/officeDocument/2006/relationships">
+  <p:cSld>
+    <p:spTree>
+      <p:nvGrpSpPr>
+        <p:cNvPr id="1" name=""/>
+        <p:cNvGrpSpPr/>
+        <p:nvPr/>
+      </p:nvGrpSpPr>
+      <p:grpSpPr/>
+      <p:sp>
+        <p:nvSpPr>
+          <p:cNvPr id="2" name="TextBox 1"/>
+          <p:cNvSpPr txBox="1"/>
+          <p:nvPr/>
+        </p:nvSpPr>
+        <p:spPr>
+          <a:xfrm>
+            <a:off x="457200" y="320040"/>
+            <a:ext cx="8229600" cy="822960"/>
+          </a:xfrm>
+          <a:prstGeom prst="rect">
+            <a:avLst/>
+          </a:prstGeom>
+          <a:noFill/>
+        </p:spPr>
+        <p:txBody>
+          <a:bodyPr wrap="square">
+            <a:spAutoFit/>
+          </a:bodyPr>
+          <a:lstStyle/>
+          <a:p>
+            <a:r>
+              <a:rPr sz="2600" b="1">
+                <a:solidFill>
+                  <a:srgbClr val="0B3D2E"/>
+                </a:solidFill>
+              </a:rPr>
+              <a:t>🔗 Referencias</a:t>
+            </a:r>
+          </a:p>
+        </p:txBody>
+      </p:sp>
+      <p:sp>
+        <p:nvSpPr>
+          <p:cNvPr id="3" name="TextBox 2"/>
+          <p:cNvSpPr txBox="1"/>
+          <p:nvPr/>
+        </p:nvSpPr>
+        <p:spPr>
+          <a:xfrm>
+            <a:off x="457200" y="1280160"/>
+            <a:ext cx="8229600" cy="4937760"/>
+          </a:xfrm>
+          <a:prstGeom prst="rect">
+            <a:avLst/>
+          </a:prstGeom>
+          <a:noFill/>
+        </p:spPr>
+        <p:txBody>
+          <a:bodyPr wrap="square">
+            <a:spAutoFit/>
+          </a:bodyPr>
+          <a:lstStyle/>
+          <a:p>
+            <a:pPr>
+              <a:spcAft>
+                <a:spcPts val="600"/>
+              </a:spcAft>
+            </a:pPr>
+            <a:r>
+              <a:rPr sz="1500">
+                <a:solidFill>
+                  <a:srgbClr val="22282E"/>
+                </a:solidFill>
+              </a:rPr>
               <a:t>•  IETF RFC 8439 (ChaCha20-Poly1305) — &lt;https://www.rfc-editor.org/rfc/rfc8439&gt;</a:t>
             </a:r>
           </a:p>
@@ -3599,6 +3855,81 @@
           </a:p>
         </p:txBody>
       </p:sp>
+    </p:spTree>
+  </p:cSld>
+  <p:clrMapOvr>
+    <a:masterClrMapping/>
+  </p:clrMapOvr>
+</p:sld>
+</file>
+
+<file path=ppt/slides/slide15.xml><?xml version="1.0" encoding="utf-8"?>
+<p:sld xmlns:a="http://schemas.openxmlformats.org/drawingml/2006/main" xmlns:p="http://schemas.openxmlformats.org/presentationml/2006/main" xmlns:r="http://schemas.openxmlformats.org/officeDocument/2006/relationships">
+  <p:cSld>
+    <p:spTree>
+      <p:nvGrpSpPr>
+        <p:cNvPr id="1" name=""/>
+        <p:cNvGrpSpPr/>
+        <p:nvPr/>
+      </p:nvGrpSpPr>
+      <p:grpSpPr/>
+      <p:sp>
+        <p:nvSpPr>
+          <p:cNvPr id="2" name="TextBox 1"/>
+          <p:cNvSpPr txBox="1"/>
+          <p:nvPr/>
+        </p:nvSpPr>
+        <p:spPr>
+          <a:xfrm>
+            <a:off x="457200" y="274320"/>
+            <a:ext cx="8229600" cy="640080"/>
+          </a:xfrm>
+          <a:prstGeom prst="rect">
+            <a:avLst/>
+          </a:prstGeom>
+          <a:noFill/>
+        </p:spPr>
+        <p:txBody>
+          <a:bodyPr wrap="square">
+            <a:spAutoFit/>
+          </a:bodyPr>
+          <a:lstStyle/>
+          <a:p>
+            <a:r>
+              <a:rPr sz="2200" b="1">
+                <a:solidFill>
+                  <a:srgbClr val="0B3D2E"/>
+                </a:solidFill>
+              </a:rPr>
+              <a:t>Diagrama de la clase</a:t>
+            </a:r>
+          </a:p>
+        </p:txBody>
+      </p:sp>
+      <p:pic>
+        <p:nvPicPr>
+          <p:cNvPr id="3" name="Picture 2" descr="2db3052fcce5416f.png"/>
+          <p:cNvPicPr>
+            <a:picLocks noChangeAspect="1"/>
+          </p:cNvPicPr>
+          <p:nvPr/>
+        </p:nvPicPr>
+        <p:blipFill>
+          <a:blip r:embed="rId2"/>
+          <a:stretch>
+            <a:fillRect/>
+          </a:stretch>
+        </p:blipFill>
+        <p:spPr>
+          <a:xfrm>
+            <a:off x="1350704" y="1097280"/>
+            <a:ext cx="6442592" cy="5303520"/>
+          </a:xfrm>
+          <a:prstGeom prst="rect">
+            <a:avLst/>
+          </a:prstGeom>
+        </p:spPr>
+      </p:pic>
     </p:spTree>
   </p:cSld>
   <p:clrMapOvr>
@@ -3683,7 +4014,7 @@
                   <a:srgbClr val="22282E"/>
                 </a:solidFill>
               </a:rPr>
-              <a:t>•  Entender qué es un cifrado de flujo, cómo genera un keystream que se combina por XOR con el texto plano, y por qué ChaCha20 (junto a Poly1305) es hoy el cifrado de flujo recomendado, mientras que RC4 está prohibido en TLS por sus sesgos estadísticos explotables. El alumno interiorizará la regla de oro: nunca reutilizar un par (clave, nonce).</a:t>
+              <a:t>•  Entender qué es un cifrado de flujo, cómo genera un keystream que se combina por XOR con el texto plano, y por qué ChaCha20 (junto a Poly1305) es hoy el cifrado de flujo recomendado, mientras que RC4…</a:t>
             </a:r>
           </a:p>
         </p:txBody>
@@ -4077,7 +4408,7 @@
                   <a:srgbClr val="0B3D2E"/>
                 </a:solidFill>
               </a:rPr>
-              <a:t>📖 Definiciones y características</a:t>
+              <a:t>🧠 Explicación en profundidad</a:t>
             </a:r>
           </a:p>
         </p:txBody>
@@ -4115,82 +4446,97 @@
                   <a:srgbClr val="22282E"/>
                 </a:solidFill>
               </a:rPr>
-              <a:t>•  Cifrado de flujo: genera un keystream pseudoaleatorio y lo combina por XOR con el texto. Característica: cifrado byte a byte, sin padding.</a:t>
-            </a:r>
-          </a:p>
-          <a:p>
-            <a:pPr>
-              <a:spcAft>
-                <a:spcPts val="600"/>
-              </a:spcAft>
-            </a:pPr>
-            <a:r>
-              <a:rPr sz="1500">
-                <a:solidFill>
-                  <a:srgbClr val="22282E"/>
-                </a:solidFill>
-              </a:rPr>
-              <a:t>•  Keystream: secuencia pseudoaleatoria derivada de (clave, nonce, contador). Debe ser único por mensaje.</a:t>
-            </a:r>
-          </a:p>
-          <a:p>
-            <a:pPr>
-              <a:spcAft>
-                <a:spcPts val="600"/>
-              </a:spcAft>
-            </a:pPr>
-            <a:r>
-              <a:rPr sz="1500">
-                <a:solidFill>
-                  <a:srgbClr val="22282E"/>
-                </a:solidFill>
-              </a:rPr>
-              <a:t>•  ChaCha20: cifrado de flujo de Daniel Bernstein con 20 rondas ARX (add-rotate-xor). Rápido en software y resistente a timing.</a:t>
-            </a:r>
-          </a:p>
-          <a:p>
-            <a:pPr>
-              <a:spcAft>
-                <a:spcPts val="600"/>
-              </a:spcAft>
-            </a:pPr>
-            <a:r>
-              <a:rPr sz="1500">
-                <a:solidFill>
-                  <a:srgbClr val="22282E"/>
-                </a:solidFill>
-              </a:rPr>
-              <a:t>•  Nonce: número usado una sola vez. En ChaCha20 (RFC 8439) mide 96 bits. Repetirlo con la misma clave es fatal.</a:t>
-            </a:r>
-          </a:p>
-          <a:p>
-            <a:pPr>
-              <a:spcAft>
-                <a:spcPts val="600"/>
-              </a:spcAft>
-            </a:pPr>
-            <a:r>
-              <a:rPr sz="1500">
-                <a:solidFill>
-                  <a:srgbClr val="22282E"/>
-                </a:solidFill>
-              </a:rPr>
-              <a:t>•  RC4: cifrado de flujo antiguo con fuertes sesgos en los primeros bytes del keystream; explotado en ataques a TLS/WEP. Obsoleto.</a:t>
-            </a:r>
-          </a:p>
-          <a:p>
-            <a:pPr>
-              <a:spcAft>
-                <a:spcPts val="600"/>
-              </a:spcAft>
-            </a:pPr>
-            <a:r>
-              <a:rPr sz="1500">
-                <a:solidFill>
-                  <a:srgbClr val="22282E"/>
-                </a:solidFill>
-              </a:rPr>
-              <a:t>•  XOR malleability: cambiar un bit del cifrado cambia el mismo bit del plano; por eso el cifrado de flujo necesita un MAC.</a:t>
+              <a:t>•  La idea es minimalista y por eso frágil: generar a partir de la clave un flujo</a:t>
+            </a:r>
+          </a:p>
+          <a:p>
+            <a:pPr>
+              <a:spcAft>
+                <a:spcPts val="600"/>
+              </a:spcAft>
+            </a:pPr>
+            <a:r>
+              <a:rPr sz="1500">
+                <a:solidFill>
+                  <a:srgbClr val="22282E"/>
+                </a:solidFill>
+              </a:rPr>
+              <a:t>•  pseudoaleatorio —el keystream— y combinarlo con el texto claro mediante XOR. El</a:t>
+            </a:r>
+          </a:p>
+          <a:p>
+            <a:pPr>
+              <a:spcAft>
+                <a:spcPts val="600"/>
+              </a:spcAft>
+            </a:pPr>
+            <a:r>
+              <a:rPr sz="1500">
+                <a:solidFill>
+                  <a:srgbClr val="22282E"/>
+                </a:solidFill>
+              </a:rPr>
+              <a:t>•  descifrado es la misma operación, porque (M ⊕ K) ⊕ K = M. Toda la seguridad recae</a:t>
+            </a:r>
+          </a:p>
+          <a:p>
+            <a:pPr>
+              <a:spcAft>
+                <a:spcPts val="600"/>
+              </a:spcAft>
+            </a:pPr>
+            <a:r>
+              <a:rPr sz="1500">
+                <a:solidFill>
+                  <a:srgbClr val="22282E"/>
+                </a:solidFill>
+              </a:rPr>
+              <a:t>•  entonces en una sola propiedad: que el keystream sea indistinguible de aleatorio y</a:t>
+            </a:r>
+          </a:p>
+          <a:p>
+            <a:pPr>
+              <a:spcAft>
+                <a:spcPts val="600"/>
+              </a:spcAft>
+            </a:pPr>
+            <a:r>
+              <a:rPr sz="1500">
+                <a:solidFill>
+                  <a:srgbClr val="22282E"/>
+                </a:solidFill>
+              </a:rPr>
+              <a:t>•  que nunca se reutilice.</a:t>
+            </a:r>
+          </a:p>
+          <a:p>
+            <a:pPr>
+              <a:spcAft>
+                <a:spcPts val="600"/>
+              </a:spcAft>
+            </a:pPr>
+            <a:r>
+              <a:rPr sz="1500">
+                <a:solidFill>
+                  <a:srgbClr val="22282E"/>
+                </a:solidFill>
+              </a:rPr>
+              <a:t>•  El ideal teórico existe y es el one-time pad: si el keystream es verdaderamente</a:t>
+            </a:r>
+          </a:p>
+          <a:p>
+            <a:pPr>
+              <a:spcAft>
+                <a:spcPts val="600"/>
+              </a:spcAft>
+            </a:pPr>
+            <a:r>
+              <a:rPr sz="1500">
+                <a:solidFill>
+                  <a:srgbClr val="22282E"/>
+                </a:solidFill>
+              </a:rPr>
+              <a:t>•  aleatorio, tan largo como el mensaje y se usa una sola vez, el cifrado es</a:t>
             </a:r>
           </a:p>
         </p:txBody>
@@ -4241,7 +4587,7 @@
                   <a:srgbClr val="0B3D2E"/>
                 </a:solidFill>
               </a:rPr>
-              <a:t>🧰 Herramientas y preparación</a:t>
+              <a:t>📖 Definiciones y características</a:t>
             </a:r>
           </a:p>
         </p:txBody>
@@ -4279,37 +4625,82 @@
                   <a:srgbClr val="22282E"/>
                 </a:solidFill>
               </a:rPr>
-              <a:t>•  pip install cryptography</a:t>
-            </a:r>
-          </a:p>
-          <a:p>
-            <a:pPr>
-              <a:spcAft>
-                <a:spcPts val="600"/>
-              </a:spcAft>
-            </a:pPr>
-            <a:r>
-              <a:rPr sz="1500">
-                <a:solidFill>
-                  <a:srgbClr val="22282E"/>
-                </a:solidFill>
-              </a:rPr>
-              <a:t>•  openssl version   # openssl enc no soporta ChaCha20 directamente; usa Python o TLS</a:t>
-            </a:r>
-          </a:p>
-          <a:p>
-            <a:pPr>
-              <a:spcAft>
-                <a:spcPts val="600"/>
-              </a:spcAft>
-            </a:pPr>
-            <a:r>
-              <a:rPr sz="1500">
-                <a:solidFill>
-                  <a:srgbClr val="22282E"/>
-                </a:solidFill>
-              </a:rPr>
-              <a:t>•  Entorno local. La reutilización de nonce se practica solo sobre datos propios de laboratorio.</a:t>
+              <a:t>•  Cifrado de flujo: genera un keystream pseudoaleatorio y lo combina por XOR con el texto. Característica: cifrado byte a byte, sin padding.</a:t>
+            </a:r>
+          </a:p>
+          <a:p>
+            <a:pPr>
+              <a:spcAft>
+                <a:spcPts val="600"/>
+              </a:spcAft>
+            </a:pPr>
+            <a:r>
+              <a:rPr sz="1500">
+                <a:solidFill>
+                  <a:srgbClr val="22282E"/>
+                </a:solidFill>
+              </a:rPr>
+              <a:t>•  Keystream: secuencia pseudoaleatoria derivada de (clave, nonce, contador). Debe ser único por mensaje.</a:t>
+            </a:r>
+          </a:p>
+          <a:p>
+            <a:pPr>
+              <a:spcAft>
+                <a:spcPts val="600"/>
+              </a:spcAft>
+            </a:pPr>
+            <a:r>
+              <a:rPr sz="1500">
+                <a:solidFill>
+                  <a:srgbClr val="22282E"/>
+                </a:solidFill>
+              </a:rPr>
+              <a:t>•  ChaCha20: cifrado de flujo de Daniel Bernstein con 20 rondas ARX (add-rotate-xor). Rápido en software y resistente a timing.</a:t>
+            </a:r>
+          </a:p>
+          <a:p>
+            <a:pPr>
+              <a:spcAft>
+                <a:spcPts val="600"/>
+              </a:spcAft>
+            </a:pPr>
+            <a:r>
+              <a:rPr sz="1500">
+                <a:solidFill>
+                  <a:srgbClr val="22282E"/>
+                </a:solidFill>
+              </a:rPr>
+              <a:t>•  Nonce: número usado una sola vez. En ChaCha20 (RFC 8439) mide 96 bits. Repetirlo con la misma clave es fatal.</a:t>
+            </a:r>
+          </a:p>
+          <a:p>
+            <a:pPr>
+              <a:spcAft>
+                <a:spcPts val="600"/>
+              </a:spcAft>
+            </a:pPr>
+            <a:r>
+              <a:rPr sz="1500">
+                <a:solidFill>
+                  <a:srgbClr val="22282E"/>
+                </a:solidFill>
+              </a:rPr>
+              <a:t>•  RC4: cifrado de flujo antiguo con fuertes sesgos en los primeros bytes del keystream; explotado en ataques a TLS/WEP. Obsoleto.</a:t>
+            </a:r>
+          </a:p>
+          <a:p>
+            <a:pPr>
+              <a:spcAft>
+                <a:spcPts val="600"/>
+              </a:spcAft>
+            </a:pPr>
+            <a:r>
+              <a:rPr sz="1500">
+                <a:solidFill>
+                  <a:srgbClr val="22282E"/>
+                </a:solidFill>
+              </a:rPr>
+              <a:t>•  XOR malleability: cambiar un bit del cifrado cambia el mismo bit del plano; por eso el cifrado de flujo necesita un MAC.</a:t>
             </a:r>
           </a:p>
         </p:txBody>
@@ -4360,7 +4751,7 @@
                   <a:srgbClr val="0B3D2E"/>
                 </a:solidFill>
               </a:rPr>
-              <a:t>🧪 Laboratorio guiado</a:t>
+              <a:t>📔 Glosario</a:t>
             </a:r>
           </a:p>
         </p:txBody>
@@ -4398,97 +4789,97 @@
                   <a:srgbClr val="22282E"/>
                 </a:solidFill>
               </a:rPr>
-              <a:t>•  ChaCha20 básico en Python:</a:t>
-            </a:r>
-          </a:p>
-          <a:p>
-            <a:pPr>
-              <a:spcAft>
-                <a:spcPts val="600"/>
-              </a:spcAft>
-            </a:pPr>
-            <a:r>
-              <a:rPr sz="1500">
-                <a:solidFill>
-                  <a:srgbClr val="22282E"/>
-                </a:solidFill>
-              </a:rPr>
-              <a:t>•  import os</a:t>
-            </a:r>
-          </a:p>
-          <a:p>
-            <a:pPr>
-              <a:spcAft>
-                <a:spcPts val="600"/>
-              </a:spcAft>
-            </a:pPr>
-            <a:r>
-              <a:rPr sz="1500">
-                <a:solidFill>
-                  <a:srgbClr val="22282E"/>
-                </a:solidFill>
-              </a:rPr>
-              <a:t>•  from cryptography.hazmat.primitives.ciphers import Cipher, algorithms</a:t>
-            </a:r>
-          </a:p>
-          <a:p>
-            <a:pPr>
-              <a:spcAft>
-                <a:spcPts val="600"/>
-              </a:spcAft>
-            </a:pPr>
-            <a:r>
-              <a:rPr sz="1500">
-                <a:solidFill>
-                  <a:srgbClr val="22282E"/>
-                </a:solidFill>
-              </a:rPr>
-              <a:t>•  key = os.urandom(32)</a:t>
-            </a:r>
-          </a:p>
-          <a:p>
-            <a:pPr>
-              <a:spcAft>
-                <a:spcPts val="600"/>
-              </a:spcAft>
-            </a:pPr>
-            <a:r>
-              <a:rPr sz="1500">
-                <a:solidFill>
-                  <a:srgbClr val="22282E"/>
-                </a:solidFill>
-              </a:rPr>
-              <a:t>•  nonce = os.urandom(16)  # 16 bytes para la primitiva raw de cryptography</a:t>
-            </a:r>
-          </a:p>
-          <a:p>
-            <a:pPr>
-              <a:spcAft>
-                <a:spcPts val="600"/>
-              </a:spcAft>
-            </a:pPr>
-            <a:r>
-              <a:rPr sz="1500">
-                <a:solidFill>
-                  <a:srgbClr val="22282E"/>
-                </a:solidFill>
-              </a:rPr>
-              <a:t>•  enc = Cipher(algorithms.ChaCha20(key, nonce), mode=None).encryptor()</a:t>
-            </a:r>
-          </a:p>
-          <a:p>
-            <a:pPr>
-              <a:spcAft>
-                <a:spcPts val="600"/>
-              </a:spcAft>
-            </a:pPr>
-            <a:r>
-              <a:rPr sz="1500">
-                <a:solidFill>
-                  <a:srgbClr val="22282E"/>
-                </a:solidFill>
-              </a:rPr>
-              <a:t>•  ct = enc.update(b"mensaje secreto")</a:t>
+              <a:t>•  Término — Definición concisa</a:t>
+            </a:r>
+          </a:p>
+          <a:p>
+            <a:pPr>
+              <a:spcAft>
+                <a:spcPts val="600"/>
+              </a:spcAft>
+            </a:pPr>
+            <a:r>
+              <a:rPr sz="1500">
+                <a:solidFill>
+                  <a:srgbClr val="22282E"/>
+                </a:solidFill>
+              </a:rPr>
+              <a:t>•  Cifrado de flujo — Genera keystream y lo combina con XOR con el mensaje</a:t>
+            </a:r>
+          </a:p>
+          <a:p>
+            <a:pPr>
+              <a:spcAft>
+                <a:spcPts val="600"/>
+              </a:spcAft>
+            </a:pPr>
+            <a:r>
+              <a:rPr sz="1500">
+                <a:solidFill>
+                  <a:srgbClr val="22282E"/>
+                </a:solidFill>
+              </a:rPr>
+              <a:t>•  Keystream — Flujo pseudoaleatorio derivado de clave y nonce</a:t>
+            </a:r>
+          </a:p>
+          <a:p>
+            <a:pPr>
+              <a:spcAft>
+                <a:spcPts val="600"/>
+              </a:spcAft>
+            </a:pPr>
+            <a:r>
+              <a:rPr sz="1500">
+                <a:solidFill>
+                  <a:srgbClr val="22282E"/>
+                </a:solidFill>
+              </a:rPr>
+              <a:t>•  XOR — Operación reversible: (M ⊕ K) ⊕ K = M</a:t>
+            </a:r>
+          </a:p>
+          <a:p>
+            <a:pPr>
+              <a:spcAft>
+                <a:spcPts val="600"/>
+              </a:spcAft>
+            </a:pPr>
+            <a:r>
+              <a:rPr sz="1500">
+                <a:solidFill>
+                  <a:srgbClr val="22282E"/>
+                </a:solidFill>
+              </a:rPr>
+              <a:t>•  One-time pad — Keystream verdaderamente aleatorio y de un solo uso; irrompible</a:t>
+            </a:r>
+          </a:p>
+          <a:p>
+            <a:pPr>
+              <a:spcAft>
+                <a:spcPts val="600"/>
+              </a:spcAft>
+            </a:pPr>
+            <a:r>
+              <a:rPr sz="1500">
+                <a:solidFill>
+                  <a:srgbClr val="22282E"/>
+                </a:solidFill>
+              </a:rPr>
+              <a:t>•  Nonce — Number used once; hace único el keystream de cada mensaje</a:t>
+            </a:r>
+          </a:p>
+          <a:p>
+            <a:pPr>
+              <a:spcAft>
+                <a:spcPts val="600"/>
+              </a:spcAft>
+            </a:pPr>
+            <a:r>
+              <a:rPr sz="1500">
+                <a:solidFill>
+                  <a:srgbClr val="22282E"/>
+                </a:solidFill>
+              </a:rPr>
+              <a:t>•  Reutilización de nonce — Cancela el keystream y destruye la confidencialidad</a:t>
             </a:r>
           </a:p>
         </p:txBody>
@@ -4539,7 +4930,7 @@
                   <a:srgbClr val="0B3D2E"/>
                 </a:solidFill>
               </a:rPr>
-              <a:t>✍️ Ejercicios</a:t>
+              <a:t>🧰 Herramientas y preparación</a:t>
             </a:r>
           </a:p>
         </p:txBody>
@@ -4577,82 +4968,7 @@
                   <a:srgbClr val="22282E"/>
                 </a:solidFill>
               </a:rPr>
-              <a:t>•  Explica por qué un cifrado de flujo no necesita padding.</a:t>
-            </a:r>
-          </a:p>
-          <a:p>
-            <a:pPr>
-              <a:spcAft>
-                <a:spcPts val="600"/>
-              </a:spcAft>
-            </a:pPr>
-            <a:r>
-              <a:rPr sz="1500">
-                <a:solidFill>
-                  <a:srgbClr val="22282E"/>
-                </a:solidFill>
-              </a:rPr>
-              <a:t>•  Demuestra matemáticamente por qué c1 XOR c2 = m1 XOR m2 con nonce repetido.</a:t>
-            </a:r>
-          </a:p>
-          <a:p>
-            <a:pPr>
-              <a:spcAft>
-                <a:spcPts val="600"/>
-              </a:spcAft>
-            </a:pPr>
-            <a:r>
-              <a:rPr sz="1500">
-                <a:solidFill>
-                  <a:srgbClr val="22282E"/>
-                </a:solidFill>
-              </a:rPr>
-              <a:t>•  Investiga el ataque a WEP y qué papel jugó RC4.</a:t>
-            </a:r>
-          </a:p>
-          <a:p>
-            <a:pPr>
-              <a:spcAft>
-                <a:spcPts val="600"/>
-              </a:spcAft>
-            </a:pPr>
-            <a:r>
-              <a:rPr sz="1500">
-                <a:solidFill>
-                  <a:srgbClr val="22282E"/>
-                </a:solidFill>
-              </a:rPr>
-              <a:t>•  ¿Por qué ChaCha20 es preferible en móviles frente a AES sin aceleración hardware?</a:t>
-            </a:r>
-          </a:p>
-          <a:p>
-            <a:pPr>
-              <a:spcAft>
-                <a:spcPts val="600"/>
-              </a:spcAft>
-            </a:pPr>
-            <a:r>
-              <a:rPr sz="1500">
-                <a:solidFill>
-                  <a:srgbClr val="22282E"/>
-                </a:solidFill>
-              </a:rPr>
-              <a:t>•  Modifica un byte de un cifrado ChaCha20 y observa el efecto en el descifrado.</a:t>
-            </a:r>
-          </a:p>
-          <a:p>
-            <a:pPr>
-              <a:spcAft>
-                <a:spcPts val="600"/>
-              </a:spcAft>
-            </a:pPr>
-            <a:r>
-              <a:rPr sz="1500">
-                <a:solidFill>
-                  <a:srgbClr val="22282E"/>
-                </a:solidFill>
-              </a:rPr>
-              <a:t>•  Explica qué añade Poly1305 que ChaCha20 solo no ofrece.</a:t>
+              <a:t>•  Entorno local. La reutilización de nonce se practica solo sobre datos propios de laboratorio.</a:t>
             </a:r>
           </a:p>
         </p:txBody>
@@ -4703,7 +5019,7 @@
                   <a:srgbClr val="0B3D2E"/>
                 </a:solidFill>
               </a:rPr>
-              <a:t>📝 Reto verificable</a:t>
+              <a:t>🧪 Laboratorio guiado</a:t>
             </a:r>
           </a:p>
         </p:txBody>
@@ -4741,7 +5057,67 @@
                   <a:srgbClr val="22282E"/>
                 </a:solidFill>
               </a:rPr>
-              <a:t>•  Implementa el ataque de "nonce reutilizado": dados dos textos cifrados con la misma clave y nonce y conocido parcialmente uno de ellos (crib dragging), recupera el otro. Criterio de aceptación: recuperas al menos el fragmento de texto plano solapado con la porción conocida, sin usar la clave.</a:t>
+              <a:t>•  ChaCha20 básico en Python:</a:t>
+            </a:r>
+          </a:p>
+          <a:p>
+            <a:pPr>
+              <a:spcAft>
+                <a:spcPts val="600"/>
+              </a:spcAft>
+            </a:pPr>
+            <a:r>
+              <a:rPr sz="1500">
+                <a:solidFill>
+                  <a:srgbClr val="22282E"/>
+                </a:solidFill>
+              </a:rPr>
+              <a:t>•  Verifica la simetría del XOR: descifra reusando la misma clave y nonce y recupera el texto.</a:t>
+            </a:r>
+          </a:p>
+          <a:p>
+            <a:pPr>
+              <a:spcAft>
+                <a:spcPts val="600"/>
+              </a:spcAft>
+            </a:pPr>
+            <a:r>
+              <a:rPr sz="1500">
+                <a:solidFill>
+                  <a:srgbClr val="22282E"/>
+                </a:solidFill>
+              </a:rPr>
+              <a:t>•  Ataque de nonce reutilizado (laboratorio propio). Cifra m1 y m2 con la misma clave y nonce. Calcula c1 XOR c2 = m1 XOR m2. Si conoces parte de m1, recuperas la parte correspondiente de m2. Documenta…</a:t>
+            </a:r>
+          </a:p>
+          <a:p>
+            <a:pPr>
+              <a:spcAft>
+                <a:spcPts val="600"/>
+              </a:spcAft>
+            </a:pPr>
+            <a:r>
+              <a:rPr sz="1500">
+                <a:solidFill>
+                  <a:srgbClr val="22282E"/>
+                </a:solidFill>
+              </a:rPr>
+              <a:t>•  Sesgo de RC4 (demostración estadística). Genera muchos keystreams RC4 con claves aleatorias y grafica la frecuencia del segundo byte: verás que no es uniforme (sesgo de Fluhrer-McGrew), la base de…</a:t>
+            </a:r>
+          </a:p>
+          <a:p>
+            <a:pPr>
+              <a:spcAft>
+                <a:spcPts val="600"/>
+              </a:spcAft>
+            </a:pPr>
+            <a:r>
+              <a:rPr sz="1500">
+                <a:solidFill>
+                  <a:srgbClr val="22282E"/>
+                </a:solidFill>
+              </a:rPr>
+              <a:t>•  Comparación de rendimiento. Mide ChaCha20 vs AES-CTR en tu CPU; en dispositivos sin AES-NI ChaCha20 suele ganar.</a:t>
             </a:r>
           </a:p>
         </p:txBody>
